--- a/public/fun/pack/pptx/reviewpro/보장점검양식프리미엄_36_본인점검_앰버스모크.pptx
+++ b/public/fun/pack/pptx/reviewpro/보장점검양식프리미엄_36_본인점검_앰버스모크.pptx
@@ -112,12 +112,12 @@
   <p:extLst>
     <p:ext uri="{521415D9-36F7-43E2-AB2F-B90AF26B5E84}">
       <p14:sectionLst xmlns:p14="http://schemas.microsoft.com/office/powerpoint/2010/main">
-        <p14:section name="시작" id="{8EE222BC-DFDE-4526-B24D-B7602BB17170}">
+        <p14:section name="시작" id="{716F1CF6-8E4A-48A3-BDA9-CF29204B8365}">
           <p14:sldIdLst>
             <p14:sldId id="256"/>
           </p14:sldIdLst>
         </p14:section>
-        <p14:section name="본문" id="{026AB18E-78D4-40FB-9BCE-77DF54BA2A6C}">
+        <p14:section name="본문" id="{030C8900-6CB2-452F-8A82-1300F5114C88}">
           <p14:sldIdLst>
             <p14:sldId id="257"/>
             <p14:sldId id="258"/>
@@ -3057,7 +3057,7 @@
             </a:lvl1pPr>
           </a:lstStyle>
           <a:p>
-            <a:fld id="{4E69950B-4960-41F6-A2EA-BC094A102561}" type="slidenum">
+            <a:fld id="{E92919FA-8750-4406-AF3A-A757DE1C6C00}" type="slidenum">
               <a:rPr lang="en-US"/>
               <a:t>‹#›</a:t>
             </a:fld>
@@ -5230,7 +5230,7 @@
             </a:lvl1pPr>
           </a:lstStyle>
           <a:p>
-            <a:fld id="{4797BD89-7EFB-4BBB-BCCA-E871F5E36A59}" type="slidenum">
+            <a:fld id="{51D8369F-4D78-463B-BBAC-DCDAB360005B}" type="slidenum">
               <a:rPr lang="en-US"/>
               <a:t>‹#›</a:t>
             </a:fld>
@@ -5900,7 +5900,7 @@
             </a:lvl1pPr>
           </a:lstStyle>
           <a:p>
-            <a:fld id="{D160F9A7-605A-4301-8AB0-24EDA74AE67C}" type="slidenum">
+            <a:fld id="{8DFA7BB9-F076-4D42-98D6-9D796FA69626}" type="slidenum">
               <a:rPr lang="en-US"/>
               <a:t>‹#›</a:t>
             </a:fld>
@@ -6763,7 +6763,7 @@
           <a:p>
             <a:r>
               <a:rPr lang="ko-KR"/>
-              <a:t>본인 점검 · 0000. 00. 00</a:t>
+              <a:t>본인 점검 · 날짜 입력</a:t>
             </a:r>
           </a:p>
           <a:p>
@@ -6854,7 +6854,7 @@
           <a:bodyPr/>
           <a:lstStyle/>
           <a:p>
-            <a:fld id="{5D133A10-59D3-4102-B1CD-427498A8F167}" type="slidenum">
+            <a:fld id="{AEC72031-0156-40BE-9EA8-C4C0535481E2}" type="slidenum">
               <a:rPr lang="en-US"/>
               <a:t>‹#›</a:t>
             </a:fld>
@@ -7370,7 +7370,7 @@
           <a:bodyPr/>
           <a:lstStyle/>
           <a:p>
-            <a:fld id="{63ABF23C-14AB-4423-BEA5-131901002162}" type="slidenum">
+            <a:fld id="{374A85DB-3524-49A6-AF29-0BDAAB59990D}" type="slidenum">
               <a:rPr lang="en-US"/>
               <a:t>‹#›</a:t>
             </a:fld>
@@ -8876,7 +8876,7 @@
           <a:bodyPr/>
           <a:lstStyle/>
           <a:p>
-            <a:fld id="{0A46A188-C8EC-4D94-8CBE-42652C7CDB08}" type="slidenum">
+            <a:fld id="{97E45AE7-F901-43E3-B68E-67F447B17CCB}" type="slidenum">
               <a:rPr lang="en-US"/>
               <a:t>‹#›</a:t>
             </a:fld>
@@ -10426,7 +10426,7 @@
           <a:bodyPr/>
           <a:lstStyle/>
           <a:p>
-            <a:fld id="{3A2B3A29-F73A-44D0-9426-7BA0BBB96852}" type="slidenum">
+            <a:fld id="{9DC8BA1A-EE3E-496D-8CEA-662D07976718}" type="slidenum">
               <a:rPr lang="en-US"/>
               <a:t>‹#›</a:t>
             </a:fld>
@@ -11306,7 +11306,7 @@
           <a:bodyPr/>
           <a:lstStyle/>
           <a:p>
-            <a:fld id="{B21A74CB-9317-4DF9-A97A-40978C4B3C6E}" type="slidenum">
+            <a:fld id="{992FD5D5-844B-4103-9DA5-B8A0BB58943D}" type="slidenum">
               <a:rPr lang="en-US"/>
               <a:t>‹#›</a:t>
             </a:fld>
